--- a/entregas/creditos_cursos_4_5/C5_M1_02_Scrum_bajo_la_lupa_PDF_interactivo_COMPLETO_con_creditos.pptx
+++ b/entregas/creditos_cursos_4_5/C5_M1_02_Scrum_bajo_la_lupa_PDF_interactivo_COMPLETO_con_creditos.pptx
@@ -11354,7 +11354,7 @@
                           </a:solidFill>
                           <a:latin typeface="Arial"/>
                         </a:rPr>
-                        <a:t>Coordinación general</a:t>
+                        <a:t>Coordinación general:</a:t>
                       </a:r>
                     </a:p>
                   </a:txBody>
@@ -11450,7 +11450,7 @@
                           </a:solidFill>
                           <a:latin typeface="Arial"/>
                         </a:rPr>
-                        <a:t>Experto temático</a:t>
+                        <a:t>Experto temático:</a:t>
                       </a:r>
                     </a:p>
                   </a:txBody>
@@ -11546,7 +11546,7 @@
                           </a:solidFill>
                           <a:latin typeface="Arial"/>
                         </a:rPr>
-                        <a:t>Diseñador de la experiencia virtual de aprendizaje</a:t>
+                        <a:t>Diseñador de la experiencia virtual de aprendizaje:</a:t>
                       </a:r>
                     </a:p>
                   </a:txBody>
@@ -11642,7 +11642,7 @@
                           </a:solidFill>
                           <a:latin typeface="Arial"/>
                         </a:rPr>
-                        <a:t>Corrección de estilo</a:t>
+                        <a:t>Corrección de estilo:</a:t>
                       </a:r>
                     </a:p>
                   </a:txBody>
@@ -11738,7 +11738,7 @@
                           </a:solidFill>
                           <a:latin typeface="Arial"/>
                         </a:rPr>
-                        <a:t>Validación pedagógica</a:t>
+                        <a:t>Validación pedagógica:</a:t>
                       </a:r>
                     </a:p>
                   </a:txBody>
@@ -11834,7 +11834,7 @@
                           </a:solidFill>
                           <a:latin typeface="Arial"/>
                         </a:rPr>
-                        <a:t>Diseño gráfico</a:t>
+                        <a:t>Diseño gráfico:</a:t>
                       </a:r>
                     </a:p>
                   </a:txBody>
@@ -11930,7 +11930,7 @@
                           </a:solidFill>
                           <a:latin typeface="Arial"/>
                         </a:rPr>
-                        <a:t>Desarrollo multimedia e interactivos</a:t>
+                        <a:t>Desarrollo de interactivos:</a:t>
                       </a:r>
                     </a:p>
                   </a:txBody>
@@ -12026,7 +12026,7 @@
                           </a:solidFill>
                           <a:latin typeface="Arial"/>
                         </a:rPr>
-                        <a:t>Disposición y ensamble</a:t>
+                        <a:t>Disposición y ensamble:</a:t>
                       </a:r>
                     </a:p>
                   </a:txBody>
